--- a/data/employees/EMP035/AST-EMP035-01.pptx
+++ b/data/employees/EMP035/AST-EMP035-01.pptx
@@ -9,6 +9,7 @@
     <p:sldId id="257" r:id="rId8"/>
     <p:sldId id="258" r:id="rId9"/>
     <p:sldId id="259" r:id="rId10"/>
+    <p:sldId id="260" r:id="rId11"/>
   </p:sldIdLst>
   <p:sldSz cx="9144000" cy="6858000" type="screen4x3"/>
   <p:notesSz cx="6858000" cy="9144000"/>
@@ -3098,42 +3099,55 @@
             <a:spLocks noGrp="1"/>
           </p:cNvSpPr>
           <p:nvPr>
-            <p:ph type="ctrTitle"/>
-          </p:nvPr>
-        </p:nvSpPr>
-        <p:spPr/>
-        <p:txBody>
-          <a:bodyPr/>
-          <a:lstStyle/>
-          <a:p>
-            <a:r>
-              <a:t>Project update deck - EMP035</a:t>
-            </a:r>
-          </a:p>
-        </p:txBody>
-      </p:sp>
-      <p:sp>
-        <p:nvSpPr>
-          <p:cNvPr id="3" name="Subtitle 2"/>
-          <p:cNvSpPr>
-            <a:spLocks noGrp="1"/>
-          </p:cNvSpPr>
-          <p:nvPr>
-            <p:ph type="subTitle" idx="1"/>
-          </p:nvPr>
-        </p:nvSpPr>
-        <p:spPr/>
-        <p:txBody>
-          <a:bodyPr/>
-          <a:lstStyle/>
-          <a:p>
-            <a:r>
-              <a:t>Casey Lee | Lead | IT</a:t>
-            </a:r>
-          </a:p>
-          <a:p>
-            <a:r>
-              <a:t>Prepared: 2025-02-06</a:t>
+            <p:ph type="title"/>
+          </p:nvPr>
+        </p:nvSpPr>
+        <p:spPr/>
+        <p:txBody>
+          <a:bodyPr/>
+          <a:lstStyle/>
+          <a:p>
+            <a:r>
+              <a:t>Ast Emp035 01 - EMP035</a:t>
+            </a:r>
+          </a:p>
+        </p:txBody>
+      </p:sp>
+      <p:sp>
+        <p:nvSpPr>
+          <p:cNvPr id="3" name="Content Placeholder 2"/>
+          <p:cNvSpPr>
+            <a:spLocks noGrp="1"/>
+          </p:cNvSpPr>
+          <p:nvPr>
+            <p:ph idx="1"/>
+          </p:nvPr>
+        </p:nvSpPr>
+        <p:spPr/>
+        <p:txBody>
+          <a:bodyPr/>
+          <a:lstStyle/>
+          <a:p>
+            <a:r>
+              <a:t>Slide 1: Executive Summary</a:t>
+            </a:r>
+          </a:p>
+          <a:p>
+            <a:pPr lvl="1"/>
+            <a:r>
+              <a:t>Section 1: Automation backlog refinement. EMP035 contributes to ast emp035 01 through recurring collaboration, clear ownership boundaries, and measurable outcomes. The team captures decisions, open issues, and handoffs so that knowledge remains discoverable for future programs.</a:t>
+            </a:r>
+          </a:p>
+          <a:p>
+            <a:pPr lvl="1"/>
+            <a:r>
+              <a:t>Section 2: Data quality remediation. EMP035 contributes to ast emp035 01 through recurring collaboration, clear ownership boundaries, and measurable outcomes. The team captures decisions, open issues, and handoffs so that knowledge remains discoverable for future programs.</a:t>
+            </a:r>
+          </a:p>
+          <a:p>
+            <a:pPr lvl="1"/>
+            <a:r>
+              <a:t>Section 3: Quarterly delivery milestones. EMP035 contributes to ast emp035 01 through recurring collaboration, clear ownership boundaries, and measurable outcomes. The team captures decisions, open issues, and handoffs so that knowledge remains discoverable for future programs.</a:t>
             </a:r>
           </a:p>
         </p:txBody>
@@ -3172,7 +3186,7 @@
           <a:lstStyle/>
           <a:p>
             <a:r>
-              <a:t>Infrastructure Utilisation Dashboard</a:t>
+              <a:t>Ast Emp035 01 - EMP035</a:t>
             </a:r>
           </a:p>
         </p:txBody>
@@ -3193,17 +3207,25 @@
           <a:lstStyle/>
           <a:p>
             <a:r>
-              <a:t>Overview of Infrastructure Utilisation Dashboard for IT department.</a:t>
-            </a:r>
-          </a:p>
-          <a:p>
-            <a:r>
-              <a:t>Responsible: Casey Lee (Lead)</a:t>
-            </a:r>
-          </a:p>
-          <a:p>
-            <a:r>
-              <a:t>Location: Fremont | Skills: Azure AI, MLOps, TypeScript, Kusto</a:t>
+              <a:t>Slide 2: Executive Summary</a:t>
+            </a:r>
+          </a:p>
+          <a:p>
+            <a:pPr lvl="1"/>
+            <a:r>
+              <a:t>Section 1: Quarterly delivery milestones. EMP035 contributes to ast emp035 01 through recurring collaboration, clear ownership boundaries, and measurable outcomes. The team captures decisions, open issues, and handoffs so that knowledge remains discoverable for future programs.</a:t>
+            </a:r>
+          </a:p>
+          <a:p>
+            <a:pPr lvl="1"/>
+            <a:r>
+              <a:t>Section 2: Quarterly delivery milestones. EMP035 contributes to ast emp035 01 through recurring collaboration, clear ownership boundaries, and measurable outcomes. The team captures decisions, open issues, and handoffs so that knowledge remains discoverable for future programs.</a:t>
+            </a:r>
+          </a:p>
+          <a:p>
+            <a:pPr lvl="1"/>
+            <a:r>
+              <a:t>Section 3: Quarterly delivery milestones. EMP035 contributes to ast emp035 01 through recurring collaboration, clear ownership boundaries, and measurable outcomes. The team captures decisions, open issues, and handoffs so that knowledge remains discoverable for future programs.</a:t>
             </a:r>
           </a:p>
         </p:txBody>
@@ -3242,7 +3264,7 @@
           <a:lstStyle/>
           <a:p>
             <a:r>
-              <a:t>Security Patch Status</a:t>
+              <a:t>Ast Emp035 01 - EMP035</a:t>
             </a:r>
           </a:p>
         </p:txBody>
@@ -3263,17 +3285,25 @@
           <a:lstStyle/>
           <a:p>
             <a:r>
-              <a:t>Overview of Security Patch Status for IT department.</a:t>
-            </a:r>
-          </a:p>
-          <a:p>
-            <a:r>
-              <a:t>Responsible: Casey Lee (Lead)</a:t>
-            </a:r>
-          </a:p>
-          <a:p>
-            <a:r>
-              <a:t>Location: Fremont | Skills: Azure AI, MLOps, TypeScript, Kusto</a:t>
+              <a:t>Slide 3: Executive Summary</a:t>
+            </a:r>
+          </a:p>
+          <a:p>
+            <a:pPr lvl="1"/>
+            <a:r>
+              <a:t>Section 1: Customer escalation analysis. EMP035 contributes to ast emp035 01 through recurring collaboration, clear ownership boundaries, and measurable outcomes. The team captures decisions, open issues, and handoffs so that knowledge remains discoverable for future programs.</a:t>
+            </a:r>
+          </a:p>
+          <a:p>
+            <a:pPr lvl="1"/>
+            <a:r>
+              <a:t>Section 2: Data quality remediation. EMP035 contributes to ast emp035 01 through recurring collaboration, clear ownership boundaries, and measurable outcomes. The team captures decisions, open issues, and handoffs so that knowledge remains discoverable for future programs.</a:t>
+            </a:r>
+          </a:p>
+          <a:p>
+            <a:pPr lvl="1"/>
+            <a:r>
+              <a:t>Section 3: Knowledge transfer and onboarding. EMP035 contributes to ast emp035 01 through recurring collaboration, clear ownership boundaries, and measurable outcomes. The team captures decisions, open issues, and handoffs so that knowledge remains discoverable for future programs.</a:t>
             </a:r>
           </a:p>
         </p:txBody>
@@ -3312,7 +3342,7 @@
           <a:lstStyle/>
           <a:p>
             <a:r>
-              <a:t>Cloud Cost Optimisation</a:t>
+              <a:t>Ast Emp035 01 - EMP035</a:t>
             </a:r>
           </a:p>
         </p:txBody>
@@ -3333,17 +3363,103 @@
           <a:lstStyle/>
           <a:p>
             <a:r>
-              <a:t>Overview of Cloud Cost Optimisation for IT department.</a:t>
-            </a:r>
-          </a:p>
-          <a:p>
-            <a:r>
-              <a:t>Responsible: Casey Lee (Lead)</a:t>
-            </a:r>
-          </a:p>
-          <a:p>
-            <a:r>
-              <a:t>Location: Fremont | Skills: Azure AI, MLOps, TypeScript, Kusto</a:t>
+              <a:t>Slide 4: Executive Summary</a:t>
+            </a:r>
+          </a:p>
+          <a:p>
+            <a:pPr lvl="1"/>
+            <a:r>
+              <a:t>Section 1: Department KPI performance. EMP035 contributes to ast emp035 01 through recurring collaboration, clear ownership boundaries, and measurable outcomes. The team captures decisions, open issues, and handoffs so that knowledge remains discoverable for future programs.</a:t>
+            </a:r>
+          </a:p>
+          <a:p>
+            <a:pPr lvl="1"/>
+            <a:r>
+              <a:t>Section 2: Data quality remediation. EMP035 contributes to ast emp035 01 through recurring collaboration, clear ownership boundaries, and measurable outcomes. The team captures decisions, open issues, and handoffs so that knowledge remains discoverable for future programs.</a:t>
+            </a:r>
+          </a:p>
+          <a:p>
+            <a:pPr lvl="1"/>
+            <a:r>
+              <a:t>Section 3: Operational risk review. EMP035 contributes to ast emp035 01 through recurring collaboration, clear ownership boundaries, and measurable outcomes. The team captures decisions, open issues, and handoffs so that knowledge remains discoverable for future programs.</a:t>
+            </a:r>
+          </a:p>
+        </p:txBody>
+      </p:sp>
+    </p:spTree>
+  </p:cSld>
+  <p:clrMapOvr>
+    <a:masterClrMapping/>
+  </p:clrMapOvr>
+</p:sld>
+</file>
+
+<file path=ppt/slides/slide5.xml><?xml version="1.0" encoding="utf-8"?>
+<p:sld xmlns:a="http://schemas.openxmlformats.org/drawingml/2006/main" xmlns:p="http://schemas.openxmlformats.org/presentationml/2006/main" xmlns:r="http://schemas.openxmlformats.org/officeDocument/2006/relationships">
+  <p:cSld>
+    <p:spTree>
+      <p:nvGrpSpPr>
+        <p:cNvPr id="1" name=""/>
+        <p:cNvGrpSpPr/>
+        <p:nvPr/>
+      </p:nvGrpSpPr>
+      <p:grpSpPr/>
+      <p:sp>
+        <p:nvSpPr>
+          <p:cNvPr id="2" name="Title 1"/>
+          <p:cNvSpPr>
+            <a:spLocks noGrp="1"/>
+          </p:cNvSpPr>
+          <p:nvPr>
+            <p:ph type="title"/>
+          </p:nvPr>
+        </p:nvSpPr>
+        <p:spPr/>
+        <p:txBody>
+          <a:bodyPr/>
+          <a:lstStyle/>
+          <a:p>
+            <a:r>
+              <a:t>Ast Emp035 01 - EMP035</a:t>
+            </a:r>
+          </a:p>
+        </p:txBody>
+      </p:sp>
+      <p:sp>
+        <p:nvSpPr>
+          <p:cNvPr id="3" name="Content Placeholder 2"/>
+          <p:cNvSpPr>
+            <a:spLocks noGrp="1"/>
+          </p:cNvSpPr>
+          <p:nvPr>
+            <p:ph idx="1"/>
+          </p:nvPr>
+        </p:nvSpPr>
+        <p:spPr/>
+        <p:txBody>
+          <a:bodyPr/>
+          <a:lstStyle/>
+          <a:p>
+            <a:r>
+              <a:t>Slide 5: Executive Summary</a:t>
+            </a:r>
+          </a:p>
+          <a:p>
+            <a:pPr lvl="1"/>
+            <a:r>
+              <a:t>Section 1: Quarterly delivery milestones. EMP035 contributes to ast emp035 01 through recurring collaboration, clear ownership boundaries, and measurable outcomes. The team captures decisions, open issues, and handoffs so that knowledge remains discoverable for future programs.</a:t>
+            </a:r>
+          </a:p>
+          <a:p>
+            <a:pPr lvl="1"/>
+            <a:r>
+              <a:t>Section 2: Automation backlog refinement. EMP035 contributes to ast emp035 01 through recurring collaboration, clear ownership boundaries, and measurable outcomes. The team captures decisions, open issues, and handoffs so that knowledge remains discoverable for future programs.</a:t>
+            </a:r>
+          </a:p>
+          <a:p>
+            <a:pPr lvl="1"/>
+            <a:r>
+              <a:t>Section 3: Quarterly delivery milestones. EMP035 contributes to ast emp035 01 through recurring collaboration, clear ownership boundaries, and measurable outcomes. The team captures decisions, open issues, and handoffs so that knowledge remains discoverable for future programs.</a:t>
             </a:r>
           </a:p>
         </p:txBody>
